--- a/booklets/slides.pptx
+++ b/booklets/slides.pptx
@@ -9621,10 +9621,10 @@
       </p:grpSpPr>
       <p:pic>
         <p:nvPicPr>
-          <p:cNvPr id="5" name="Segnaposto contenuto 4" descr="Immagine che contiene testo, diagramma, Piano, linea&#10;&#10;Il contenuto generato dall'IA potrebbe non essere corretto.">
+          <p:cNvPr id="6" name="Picture 5">
             <a:extLst>
               <a:ext uri="{FF2B5EF4-FFF2-40B4-BE49-F238E27FC236}">
-                <a16:creationId xmlns:a16="http://schemas.microsoft.com/office/drawing/2014/main" id="{F27A9A68-58C9-32D3-C3CD-437DEBE1D5F9}"/>
+                <a16:creationId xmlns:a16="http://schemas.microsoft.com/office/drawing/2014/main" id="{EAF6260A-742F-032A-4011-7AFBEFCB9D2A}"/>
               </a:ext>
             </a:extLst>
           </p:cNvPr>
@@ -9641,16 +9641,12 @@
         </p:blipFill>
         <p:spPr>
           <a:xfrm>
-            <a:off x="522214" y="308150"/>
-            <a:ext cx="8099571" cy="4527200"/>
+            <a:off x="327102" y="200299"/>
+            <a:ext cx="8526966" cy="4763668"/>
           </a:xfrm>
           <a:prstGeom prst="rect">
             <a:avLst/>
           </a:prstGeom>
-          <a:noFill/>
-          <a:ln>
-            <a:noFill/>
-          </a:ln>
         </p:spPr>
       </p:pic>
     </p:spTree>
